--- a/docs/pptx/auc3/ritu-auc3-linsubhr-egfrdisc-aki2.pptx
+++ b/docs/pptx/auc3/ritu-auc3-linsubhr-egfrdisc-aki2.pptx
@@ -2443,7 +2443,7 @@
           </p:nvSpPr>
           <p:spPr>
             <a:xfrm>
-              <a:off x="2040316" y="2073503"/>
+              <a:off x="2044638" y="2073503"/>
               <a:ext cx="0" cy="3649639"/>
             </a:xfrm>
             <a:custGeom>
@@ -2486,7 +2486,7 @@
           </p:nvSpPr>
           <p:spPr>
             <a:xfrm>
-              <a:off x="4520982" y="2073503"/>
+              <a:off x="4520586" y="2073503"/>
               <a:ext cx="0" cy="3649639"/>
             </a:xfrm>
             <a:custGeom>
@@ -2529,7 +2529,7 @@
           </p:nvSpPr>
           <p:spPr>
             <a:xfrm>
-              <a:off x="7001648" y="2073503"/>
+              <a:off x="6996534" y="2073503"/>
               <a:ext cx="0" cy="3649639"/>
             </a:xfrm>
             <a:custGeom>
@@ -2787,7 +2787,7 @@
           </p:nvSpPr>
           <p:spPr>
             <a:xfrm>
-              <a:off x="3280649" y="2073503"/>
+              <a:off x="3282612" y="2073503"/>
               <a:ext cx="0" cy="3649639"/>
             </a:xfrm>
             <a:custGeom>
@@ -2830,7 +2830,7 @@
           </p:nvSpPr>
           <p:spPr>
             <a:xfrm>
-              <a:off x="5761315" y="2073503"/>
+              <a:off x="5758560" y="2073503"/>
               <a:ext cx="0" cy="3649639"/>
             </a:xfrm>
             <a:custGeom>
@@ -2873,7 +2873,7 @@
           </p:nvSpPr>
           <p:spPr>
             <a:xfrm>
-              <a:off x="8241981" y="2073503"/>
+              <a:off x="8234508" y="2073503"/>
               <a:ext cx="0" cy="3649639"/>
             </a:xfrm>
             <a:custGeom>
@@ -2917,461 +2917,461 @@
           <p:spPr>
             <a:xfrm>
               <a:off x="1172049" y="2073503"/>
-              <a:ext cx="7090630" cy="3464195"/>
+              <a:ext cx="7090630" cy="3464252"/>
             </a:xfrm>
             <a:custGeom>
               <a:avLst/>
               <a:pathLst>
-                <a:path w="7090630" h="3464195">
+                <a:path w="7090630" h="3464252">
                   <a:moveTo>
-                    <a:pt x="3625617" y="0"/>
+                    <a:pt x="3630195" y="0"/>
                   </a:moveTo>
                   <a:lnTo>
-                    <a:pt x="3652748" y="143061"/>
-                  </a:lnTo>
-                  <a:lnTo>
-                    <a:pt x="3724371" y="482359"/>
-                  </a:lnTo>
-                  <a:lnTo>
-                    <a:pt x="3795993" y="787196"/>
-                  </a:lnTo>
-                  <a:lnTo>
-                    <a:pt x="3867616" y="1061073"/>
-                  </a:lnTo>
-                  <a:lnTo>
-                    <a:pt x="3939238" y="1307133"/>
-                  </a:lnTo>
-                  <a:lnTo>
-                    <a:pt x="4010861" y="1528201"/>
-                  </a:lnTo>
-                  <a:lnTo>
-                    <a:pt x="4082483" y="1726817"/>
-                  </a:lnTo>
-                  <a:lnTo>
-                    <a:pt x="4154106" y="1905260"/>
-                  </a:lnTo>
-                  <a:lnTo>
-                    <a:pt x="4225729" y="2065580"/>
-                  </a:lnTo>
-                  <a:lnTo>
-                    <a:pt x="4297351" y="2209617"/>
-                  </a:lnTo>
-                  <a:lnTo>
-                    <a:pt x="4368974" y="2339024"/>
-                  </a:lnTo>
-                  <a:lnTo>
-                    <a:pt x="4440596" y="2455288"/>
-                  </a:lnTo>
-                  <a:lnTo>
-                    <a:pt x="4512219" y="2559744"/>
-                  </a:lnTo>
-                  <a:lnTo>
-                    <a:pt x="4583841" y="2653591"/>
-                  </a:lnTo>
-                  <a:lnTo>
-                    <a:pt x="4655464" y="2667601"/>
-                  </a:lnTo>
-                  <a:lnTo>
-                    <a:pt x="4727086" y="2680808"/>
-                  </a:lnTo>
-                  <a:lnTo>
-                    <a:pt x="4798709" y="2693801"/>
-                  </a:lnTo>
-                  <a:lnTo>
-                    <a:pt x="4870331" y="2706584"/>
-                  </a:lnTo>
-                  <a:lnTo>
-                    <a:pt x="4941954" y="2719160"/>
-                  </a:lnTo>
-                  <a:lnTo>
-                    <a:pt x="5013576" y="2731532"/>
-                  </a:lnTo>
-                  <a:lnTo>
-                    <a:pt x="5085199" y="2743704"/>
-                  </a:lnTo>
-                  <a:lnTo>
-                    <a:pt x="5156821" y="2755679"/>
-                  </a:lnTo>
-                  <a:lnTo>
-                    <a:pt x="5228444" y="2767461"/>
-                  </a:lnTo>
-                  <a:lnTo>
-                    <a:pt x="5300066" y="2779052"/>
-                  </a:lnTo>
-                  <a:lnTo>
-                    <a:pt x="5371689" y="2790455"/>
-                  </a:lnTo>
-                  <a:lnTo>
-                    <a:pt x="5443311" y="2801673"/>
-                  </a:lnTo>
-                  <a:lnTo>
-                    <a:pt x="5514934" y="2812711"/>
-                  </a:lnTo>
-                  <a:lnTo>
-                    <a:pt x="5586557" y="2823569"/>
-                  </a:lnTo>
-                  <a:lnTo>
-                    <a:pt x="5658179" y="2834252"/>
-                  </a:lnTo>
-                  <a:lnTo>
-                    <a:pt x="5729802" y="2844762"/>
-                  </a:lnTo>
-                  <a:lnTo>
-                    <a:pt x="5801424" y="2855102"/>
-                  </a:lnTo>
-                  <a:lnTo>
-                    <a:pt x="5873047" y="2865274"/>
-                  </a:lnTo>
-                  <a:lnTo>
-                    <a:pt x="5944669" y="2875282"/>
-                  </a:lnTo>
-                  <a:lnTo>
-                    <a:pt x="6016292" y="2885128"/>
-                  </a:lnTo>
-                  <a:lnTo>
-                    <a:pt x="6087914" y="2894815"/>
-                  </a:lnTo>
-                  <a:lnTo>
-                    <a:pt x="6159537" y="2904345"/>
-                  </a:lnTo>
-                  <a:lnTo>
-                    <a:pt x="6231159" y="2913721"/>
-                  </a:lnTo>
-                  <a:lnTo>
-                    <a:pt x="6302782" y="2922945"/>
-                  </a:lnTo>
-                  <a:lnTo>
-                    <a:pt x="6374404" y="2932020"/>
-                  </a:lnTo>
-                  <a:lnTo>
-                    <a:pt x="6446027" y="2940947"/>
-                  </a:lnTo>
-                  <a:lnTo>
-                    <a:pt x="6517649" y="2949731"/>
-                  </a:lnTo>
-                  <a:lnTo>
-                    <a:pt x="6589272" y="2958372"/>
-                  </a:lnTo>
-                  <a:lnTo>
-                    <a:pt x="6660894" y="2966874"/>
-                  </a:lnTo>
-                  <a:lnTo>
-                    <a:pt x="6732517" y="2975238"/>
-                  </a:lnTo>
-                  <a:lnTo>
-                    <a:pt x="6804139" y="2983466"/>
-                  </a:lnTo>
-                  <a:lnTo>
-                    <a:pt x="6875762" y="2991562"/>
-                  </a:lnTo>
-                  <a:lnTo>
-                    <a:pt x="6947385" y="2999526"/>
-                  </a:lnTo>
-                  <a:lnTo>
-                    <a:pt x="7019007" y="3007362"/>
-                  </a:lnTo>
-                  <a:lnTo>
-                    <a:pt x="7090630" y="3015070"/>
-                  </a:lnTo>
-                  <a:lnTo>
-                    <a:pt x="7090630" y="3464195"/>
-                  </a:lnTo>
-                  <a:lnTo>
-                    <a:pt x="7019007" y="3461984"/>
-                  </a:lnTo>
-                  <a:lnTo>
-                    <a:pt x="6947385" y="3459524"/>
-                  </a:lnTo>
-                  <a:lnTo>
-                    <a:pt x="6875762" y="3456786"/>
-                  </a:lnTo>
-                  <a:lnTo>
-                    <a:pt x="6804139" y="3453738"/>
-                  </a:lnTo>
-                  <a:lnTo>
-                    <a:pt x="6732517" y="3450346"/>
-                  </a:lnTo>
-                  <a:lnTo>
-                    <a:pt x="6660894" y="3446570"/>
-                  </a:lnTo>
-                  <a:lnTo>
-                    <a:pt x="6589272" y="3442367"/>
-                  </a:lnTo>
-                  <a:lnTo>
-                    <a:pt x="6517649" y="3437690"/>
-                  </a:lnTo>
-                  <a:lnTo>
-                    <a:pt x="6446027" y="3432483"/>
-                  </a:lnTo>
-                  <a:lnTo>
-                    <a:pt x="6374404" y="3426688"/>
-                  </a:lnTo>
-                  <a:lnTo>
-                    <a:pt x="6302782" y="3420238"/>
-                  </a:lnTo>
-                  <a:lnTo>
-                    <a:pt x="6231159" y="3413058"/>
-                  </a:lnTo>
-                  <a:lnTo>
-                    <a:pt x="6159537" y="3405067"/>
-                  </a:lnTo>
-                  <a:lnTo>
-                    <a:pt x="6087914" y="3396172"/>
-                  </a:lnTo>
-                  <a:lnTo>
-                    <a:pt x="6016292" y="3386272"/>
-                  </a:lnTo>
-                  <a:lnTo>
-                    <a:pt x="5944669" y="3375253"/>
-                  </a:lnTo>
-                  <a:lnTo>
-                    <a:pt x="5873047" y="3362989"/>
-                  </a:lnTo>
-                  <a:lnTo>
-                    <a:pt x="5801424" y="3349337"/>
-                  </a:lnTo>
-                  <a:lnTo>
-                    <a:pt x="5729802" y="3334143"/>
-                  </a:lnTo>
-                  <a:lnTo>
-                    <a:pt x="5658179" y="3317230"/>
-                  </a:lnTo>
-                  <a:lnTo>
-                    <a:pt x="5586557" y="3298406"/>
-                  </a:lnTo>
-                  <a:lnTo>
-                    <a:pt x="5514934" y="3277454"/>
-                  </a:lnTo>
-                  <a:lnTo>
-                    <a:pt x="5443311" y="3254133"/>
-                  </a:lnTo>
-                  <a:lnTo>
-                    <a:pt x="5371689" y="3228176"/>
-                  </a:lnTo>
-                  <a:lnTo>
-                    <a:pt x="5300066" y="3199285"/>
-                  </a:lnTo>
-                  <a:lnTo>
-                    <a:pt x="5228444" y="3167127"/>
-                  </a:lnTo>
-                  <a:lnTo>
-                    <a:pt x="5156821" y="3131334"/>
-                  </a:lnTo>
-                  <a:lnTo>
-                    <a:pt x="5085199" y="3091495"/>
-                  </a:lnTo>
-                  <a:lnTo>
-                    <a:pt x="5013576" y="3047152"/>
-                  </a:lnTo>
-                  <a:lnTo>
-                    <a:pt x="4941954" y="2997796"/>
-                  </a:lnTo>
-                  <a:lnTo>
-                    <a:pt x="4870331" y="2942861"/>
-                  </a:lnTo>
-                  <a:lnTo>
-                    <a:pt x="4798709" y="2881715"/>
-                  </a:lnTo>
-                  <a:lnTo>
-                    <a:pt x="4727086" y="2813658"/>
-                  </a:lnTo>
-                  <a:lnTo>
-                    <a:pt x="4655464" y="2737906"/>
-                  </a:lnTo>
-                  <a:lnTo>
-                    <a:pt x="4583841" y="2654177"/>
-                  </a:lnTo>
-                  <a:lnTo>
-                    <a:pt x="4512219" y="2640533"/>
-                  </a:lnTo>
-                  <a:lnTo>
-                    <a:pt x="4440596" y="2626664"/>
-                  </a:lnTo>
-                  <a:lnTo>
-                    <a:pt x="4368974" y="2612566"/>
-                  </a:lnTo>
-                  <a:lnTo>
-                    <a:pt x="4297351" y="2598237"/>
-                  </a:lnTo>
-                  <a:lnTo>
-                    <a:pt x="4225729" y="2583673"/>
-                  </a:lnTo>
-                  <a:lnTo>
-                    <a:pt x="4154106" y="2568868"/>
-                  </a:lnTo>
-                  <a:lnTo>
-                    <a:pt x="4082483" y="2553820"/>
-                  </a:lnTo>
-                  <a:lnTo>
-                    <a:pt x="4010861" y="2538525"/>
-                  </a:lnTo>
-                  <a:lnTo>
-                    <a:pt x="3939238" y="2522978"/>
-                  </a:lnTo>
-                  <a:lnTo>
-                    <a:pt x="3867616" y="2507175"/>
-                  </a:lnTo>
-                  <a:lnTo>
-                    <a:pt x="3795993" y="2491113"/>
-                  </a:lnTo>
-                  <a:lnTo>
-                    <a:pt x="3724371" y="2474786"/>
-                  </a:lnTo>
-                  <a:lnTo>
-                    <a:pt x="3652748" y="2458191"/>
-                  </a:lnTo>
-                  <a:lnTo>
-                    <a:pt x="3581126" y="2441323"/>
-                  </a:lnTo>
-                  <a:lnTo>
-                    <a:pt x="3509503" y="2424177"/>
-                  </a:lnTo>
-                  <a:lnTo>
-                    <a:pt x="3437881" y="2406749"/>
-                  </a:lnTo>
-                  <a:lnTo>
-                    <a:pt x="3366258" y="2389035"/>
-                  </a:lnTo>
-                  <a:lnTo>
-                    <a:pt x="3294636" y="2371029"/>
-                  </a:lnTo>
-                  <a:lnTo>
-                    <a:pt x="3223013" y="2352727"/>
-                  </a:lnTo>
-                  <a:lnTo>
-                    <a:pt x="3151391" y="2334124"/>
-                  </a:lnTo>
-                  <a:lnTo>
-                    <a:pt x="3079768" y="2315215"/>
-                  </a:lnTo>
-                  <a:lnTo>
-                    <a:pt x="3008146" y="2295995"/>
-                  </a:lnTo>
-                  <a:lnTo>
-                    <a:pt x="2936523" y="2276459"/>
-                  </a:lnTo>
-                  <a:lnTo>
-                    <a:pt x="2864901" y="2256602"/>
-                  </a:lnTo>
-                  <a:lnTo>
-                    <a:pt x="2793278" y="2236418"/>
-                  </a:lnTo>
-                  <a:lnTo>
-                    <a:pt x="2721655" y="2215902"/>
-                  </a:lnTo>
-                  <a:lnTo>
-                    <a:pt x="2650033" y="2195049"/>
-                  </a:lnTo>
-                  <a:lnTo>
-                    <a:pt x="2578410" y="2173852"/>
-                  </a:lnTo>
-                  <a:lnTo>
-                    <a:pt x="2506788" y="2152307"/>
-                  </a:lnTo>
-                  <a:lnTo>
-                    <a:pt x="2435165" y="2130408"/>
-                  </a:lnTo>
-                  <a:lnTo>
-                    <a:pt x="2363543" y="2108148"/>
-                  </a:lnTo>
-                  <a:lnTo>
-                    <a:pt x="2291920" y="2085522"/>
-                  </a:lnTo>
-                  <a:lnTo>
-                    <a:pt x="2220298" y="2062524"/>
-                  </a:lnTo>
-                  <a:lnTo>
-                    <a:pt x="2148675" y="2039148"/>
-                  </a:lnTo>
-                  <a:lnTo>
-                    <a:pt x="2077053" y="2015388"/>
-                  </a:lnTo>
-                  <a:lnTo>
-                    <a:pt x="2005430" y="1991236"/>
-                  </a:lnTo>
-                  <a:lnTo>
-                    <a:pt x="1933808" y="1966688"/>
-                  </a:lnTo>
-                  <a:lnTo>
-                    <a:pt x="1862185" y="1941735"/>
-                  </a:lnTo>
-                  <a:lnTo>
-                    <a:pt x="1790563" y="1916372"/>
-                  </a:lnTo>
-                  <a:lnTo>
-                    <a:pt x="1718940" y="1890592"/>
-                  </a:lnTo>
-                  <a:lnTo>
-                    <a:pt x="1647318" y="1864388"/>
-                  </a:lnTo>
-                  <a:lnTo>
-                    <a:pt x="1575695" y="1837753"/>
-                  </a:lnTo>
-                  <a:lnTo>
-                    <a:pt x="1504073" y="1810680"/>
-                  </a:lnTo>
-                  <a:lnTo>
-                    <a:pt x="1432450" y="1783161"/>
-                  </a:lnTo>
-                  <a:lnTo>
-                    <a:pt x="1360827" y="1755190"/>
-                  </a:lnTo>
-                  <a:lnTo>
-                    <a:pt x="1289205" y="1726759"/>
-                  </a:lnTo>
-                  <a:lnTo>
-                    <a:pt x="1217582" y="1697860"/>
-                  </a:lnTo>
-                  <a:lnTo>
-                    <a:pt x="1145960" y="1668486"/>
-                  </a:lnTo>
-                  <a:lnTo>
-                    <a:pt x="1074337" y="1638629"/>
-                  </a:lnTo>
-                  <a:lnTo>
-                    <a:pt x="1002715" y="1608280"/>
-                  </a:lnTo>
-                  <a:lnTo>
-                    <a:pt x="931092" y="1577433"/>
-                  </a:lnTo>
-                  <a:lnTo>
-                    <a:pt x="859470" y="1546078"/>
-                  </a:lnTo>
-                  <a:lnTo>
-                    <a:pt x="787847" y="1514207"/>
-                  </a:lnTo>
-                  <a:lnTo>
-                    <a:pt x="716225" y="1481813"/>
-                  </a:lnTo>
-                  <a:lnTo>
-                    <a:pt x="644602" y="1448885"/>
-                  </a:lnTo>
-                  <a:lnTo>
-                    <a:pt x="572980" y="1415416"/>
-                  </a:lnTo>
-                  <a:lnTo>
-                    <a:pt x="501357" y="1381396"/>
-                  </a:lnTo>
-                  <a:lnTo>
-                    <a:pt x="429735" y="1346817"/>
-                  </a:lnTo>
-                  <a:lnTo>
-                    <a:pt x="358112" y="1311669"/>
-                  </a:lnTo>
-                  <a:lnTo>
-                    <a:pt x="286490" y="1275942"/>
-                  </a:lnTo>
-                  <a:lnTo>
-                    <a:pt x="214867" y="1239629"/>
-                  </a:lnTo>
-                  <a:lnTo>
-                    <a:pt x="143245" y="1202717"/>
-                  </a:lnTo>
-                  <a:lnTo>
-                    <a:pt x="71622" y="1165199"/>
-                  </a:lnTo>
-                  <a:lnTo>
-                    <a:pt x="0" y="1127064"/>
+                    <a:pt x="3652748" y="119981"/>
+                  </a:lnTo>
+                  <a:lnTo>
+                    <a:pt x="3724371" y="462241"/>
+                  </a:lnTo>
+                  <a:lnTo>
+                    <a:pt x="3795993" y="769676"/>
+                  </a:lnTo>
+                  <a:lnTo>
+                    <a:pt x="3867616" y="1045829"/>
+                  </a:lnTo>
+                  <a:lnTo>
+                    <a:pt x="3939238" y="1293885"/>
+                  </a:lnTo>
+                  <a:lnTo>
+                    <a:pt x="4010861" y="1516701"/>
+                  </a:lnTo>
+                  <a:lnTo>
+                    <a:pt x="4082483" y="1716845"/>
+                  </a:lnTo>
+                  <a:lnTo>
+                    <a:pt x="4154106" y="1896625"/>
+                  </a:lnTo>
+                  <a:lnTo>
+                    <a:pt x="4225729" y="2058113"/>
+                  </a:lnTo>
+                  <a:lnTo>
+                    <a:pt x="4297351" y="2203170"/>
+                  </a:lnTo>
+                  <a:lnTo>
+                    <a:pt x="4368974" y="2333467"/>
+                  </a:lnTo>
+                  <a:lnTo>
+                    <a:pt x="4440596" y="2450507"/>
+                  </a:lnTo>
+                  <a:lnTo>
+                    <a:pt x="4512219" y="2555638"/>
+                  </a:lnTo>
+                  <a:lnTo>
+                    <a:pt x="4583841" y="2650072"/>
+                  </a:lnTo>
+                  <a:lnTo>
+                    <a:pt x="4655464" y="2667101"/>
+                  </a:lnTo>
+                  <a:lnTo>
+                    <a:pt x="4727086" y="2680340"/>
+                  </a:lnTo>
+                  <a:lnTo>
+                    <a:pt x="4798709" y="2693365"/>
+                  </a:lnTo>
+                  <a:lnTo>
+                    <a:pt x="4870331" y="2706179"/>
+                  </a:lnTo>
+                  <a:lnTo>
+                    <a:pt x="4941954" y="2718785"/>
+                  </a:lnTo>
+                  <a:lnTo>
+                    <a:pt x="5013576" y="2731187"/>
+                  </a:lnTo>
+                  <a:lnTo>
+                    <a:pt x="5085199" y="2743388"/>
+                  </a:lnTo>
+                  <a:lnTo>
+                    <a:pt x="5156821" y="2755391"/>
+                  </a:lnTo>
+                  <a:lnTo>
+                    <a:pt x="5228444" y="2767199"/>
+                  </a:lnTo>
+                  <a:lnTo>
+                    <a:pt x="5300066" y="2778816"/>
+                  </a:lnTo>
+                  <a:lnTo>
+                    <a:pt x="5371689" y="2790245"/>
+                  </a:lnTo>
+                  <a:lnTo>
+                    <a:pt x="5443311" y="2801488"/>
+                  </a:lnTo>
+                  <a:lnTo>
+                    <a:pt x="5514934" y="2812549"/>
+                  </a:lnTo>
+                  <a:lnTo>
+                    <a:pt x="5586557" y="2823431"/>
+                  </a:lnTo>
+                  <a:lnTo>
+                    <a:pt x="5658179" y="2834136"/>
+                  </a:lnTo>
+                  <a:lnTo>
+                    <a:pt x="5729802" y="2844668"/>
+                  </a:lnTo>
+                  <a:lnTo>
+                    <a:pt x="5801424" y="2855028"/>
+                  </a:lnTo>
+                  <a:lnTo>
+                    <a:pt x="5873047" y="2865221"/>
+                  </a:lnTo>
+                  <a:lnTo>
+                    <a:pt x="5944669" y="2875249"/>
+                  </a:lnTo>
+                  <a:lnTo>
+                    <a:pt x="6016292" y="2885114"/>
+                  </a:lnTo>
+                  <a:lnTo>
+                    <a:pt x="6087914" y="2894819"/>
+                  </a:lnTo>
+                  <a:lnTo>
+                    <a:pt x="6159537" y="2904367"/>
+                  </a:lnTo>
+                  <a:lnTo>
+                    <a:pt x="6231159" y="2913760"/>
+                  </a:lnTo>
+                  <a:lnTo>
+                    <a:pt x="6302782" y="2923001"/>
+                  </a:lnTo>
+                  <a:lnTo>
+                    <a:pt x="6374404" y="2932092"/>
+                  </a:lnTo>
+                  <a:lnTo>
+                    <a:pt x="6446027" y="2941036"/>
+                  </a:lnTo>
+                  <a:lnTo>
+                    <a:pt x="6517649" y="2949834"/>
+                  </a:lnTo>
+                  <a:lnTo>
+                    <a:pt x="6589272" y="2958490"/>
+                  </a:lnTo>
+                  <a:lnTo>
+                    <a:pt x="6660894" y="2967006"/>
+                  </a:lnTo>
+                  <a:lnTo>
+                    <a:pt x="6732517" y="2975383"/>
+                  </a:lnTo>
+                  <a:lnTo>
+                    <a:pt x="6804139" y="2983625"/>
+                  </a:lnTo>
+                  <a:lnTo>
+                    <a:pt x="6875762" y="2991733"/>
+                  </a:lnTo>
+                  <a:lnTo>
+                    <a:pt x="6947385" y="2999710"/>
+                  </a:lnTo>
+                  <a:lnTo>
+                    <a:pt x="7019007" y="3007557"/>
+                  </a:lnTo>
+                  <a:lnTo>
+                    <a:pt x="7090630" y="3015277"/>
+                  </a:lnTo>
+                  <a:lnTo>
+                    <a:pt x="7090630" y="3464252"/>
+                  </a:lnTo>
+                  <a:lnTo>
+                    <a:pt x="7019007" y="3462043"/>
+                  </a:lnTo>
+                  <a:lnTo>
+                    <a:pt x="6947385" y="3459585"/>
+                  </a:lnTo>
+                  <a:lnTo>
+                    <a:pt x="6875762" y="3456848"/>
+                  </a:lnTo>
+                  <a:lnTo>
+                    <a:pt x="6804139" y="3453801"/>
+                  </a:lnTo>
+                  <a:lnTo>
+                    <a:pt x="6732517" y="3450409"/>
+                  </a:lnTo>
+                  <a:lnTo>
+                    <a:pt x="6660894" y="3446633"/>
+                  </a:lnTo>
+                  <a:lnTo>
+                    <a:pt x="6589272" y="3442429"/>
+                  </a:lnTo>
+                  <a:lnTo>
+                    <a:pt x="6517649" y="3437749"/>
+                  </a:lnTo>
+                  <a:lnTo>
+                    <a:pt x="6446027" y="3432538"/>
+                  </a:lnTo>
+                  <a:lnTo>
+                    <a:pt x="6374404" y="3426738"/>
+                  </a:lnTo>
+                  <a:lnTo>
+                    <a:pt x="6302782" y="3420280"/>
+                  </a:lnTo>
+                  <a:lnTo>
+                    <a:pt x="6231159" y="3413091"/>
+                  </a:lnTo>
+                  <a:lnTo>
+                    <a:pt x="6159537" y="3405088"/>
+                  </a:lnTo>
+                  <a:lnTo>
+                    <a:pt x="6087914" y="3396178"/>
+                  </a:lnTo>
+                  <a:lnTo>
+                    <a:pt x="6016292" y="3386258"/>
+                  </a:lnTo>
+                  <a:lnTo>
+                    <a:pt x="5944669" y="3375215"/>
+                  </a:lnTo>
+                  <a:lnTo>
+                    <a:pt x="5873047" y="3362921"/>
+                  </a:lnTo>
+                  <a:lnTo>
+                    <a:pt x="5801424" y="3349235"/>
+                  </a:lnTo>
+                  <a:lnTo>
+                    <a:pt x="5729802" y="3333998"/>
+                  </a:lnTo>
+                  <a:lnTo>
+                    <a:pt x="5658179" y="3317036"/>
+                  </a:lnTo>
+                  <a:lnTo>
+                    <a:pt x="5586557" y="3298152"/>
+                  </a:lnTo>
+                  <a:lnTo>
+                    <a:pt x="5514934" y="3277129"/>
+                  </a:lnTo>
+                  <a:lnTo>
+                    <a:pt x="5443311" y="3253724"/>
+                  </a:lnTo>
+                  <a:lnTo>
+                    <a:pt x="5371689" y="3227668"/>
+                  </a:lnTo>
+                  <a:lnTo>
+                    <a:pt x="5300066" y="3198661"/>
+                  </a:lnTo>
+                  <a:lnTo>
+                    <a:pt x="5228444" y="3166369"/>
+                  </a:lnTo>
+                  <a:lnTo>
+                    <a:pt x="5156821" y="3130418"/>
+                  </a:lnTo>
+                  <a:lnTo>
+                    <a:pt x="5085199" y="3090395"/>
+                  </a:lnTo>
+                  <a:lnTo>
+                    <a:pt x="5013576" y="3045838"/>
+                  </a:lnTo>
+                  <a:lnTo>
+                    <a:pt x="4941954" y="2996234"/>
+                  </a:lnTo>
+                  <a:lnTo>
+                    <a:pt x="4870331" y="2941012"/>
+                  </a:lnTo>
+                  <a:lnTo>
+                    <a:pt x="4798709" y="2879534"/>
+                  </a:lnTo>
+                  <a:lnTo>
+                    <a:pt x="4727086" y="2811092"/>
+                  </a:lnTo>
+                  <a:lnTo>
+                    <a:pt x="4655464" y="2734897"/>
+                  </a:lnTo>
+                  <a:lnTo>
+                    <a:pt x="4583841" y="2653643"/>
+                  </a:lnTo>
+                  <a:lnTo>
+                    <a:pt x="4512219" y="2639963"/>
+                  </a:lnTo>
+                  <a:lnTo>
+                    <a:pt x="4440596" y="2626058"/>
+                  </a:lnTo>
+                  <a:lnTo>
+                    <a:pt x="4368974" y="2611924"/>
+                  </a:lnTo>
+                  <a:lnTo>
+                    <a:pt x="4297351" y="2597557"/>
+                  </a:lnTo>
+                  <a:lnTo>
+                    <a:pt x="4225729" y="2582953"/>
+                  </a:lnTo>
+                  <a:lnTo>
+                    <a:pt x="4154106" y="2568108"/>
+                  </a:lnTo>
+                  <a:lnTo>
+                    <a:pt x="4082483" y="2553019"/>
+                  </a:lnTo>
+                  <a:lnTo>
+                    <a:pt x="4010861" y="2537681"/>
+                  </a:lnTo>
+                  <a:lnTo>
+                    <a:pt x="3939238" y="2522090"/>
+                  </a:lnTo>
+                  <a:lnTo>
+                    <a:pt x="3867616" y="2506243"/>
+                  </a:lnTo>
+                  <a:lnTo>
+                    <a:pt x="3795993" y="2490134"/>
+                  </a:lnTo>
+                  <a:lnTo>
+                    <a:pt x="3724371" y="2473760"/>
+                  </a:lnTo>
+                  <a:lnTo>
+                    <a:pt x="3652748" y="2457116"/>
+                  </a:lnTo>
+                  <a:lnTo>
+                    <a:pt x="3581126" y="2440197"/>
+                  </a:lnTo>
+                  <a:lnTo>
+                    <a:pt x="3509503" y="2423000"/>
+                  </a:lnTo>
+                  <a:lnTo>
+                    <a:pt x="3437881" y="2405520"/>
+                  </a:lnTo>
+                  <a:lnTo>
+                    <a:pt x="3366258" y="2387751"/>
+                  </a:lnTo>
+                  <a:lnTo>
+                    <a:pt x="3294636" y="2369689"/>
+                  </a:lnTo>
+                  <a:lnTo>
+                    <a:pt x="3223013" y="2351330"/>
+                  </a:lnTo>
+                  <a:lnTo>
+                    <a:pt x="3151391" y="2332669"/>
+                  </a:lnTo>
+                  <a:lnTo>
+                    <a:pt x="3079768" y="2313700"/>
+                  </a:lnTo>
+                  <a:lnTo>
+                    <a:pt x="3008146" y="2294418"/>
+                  </a:lnTo>
+                  <a:lnTo>
+                    <a:pt x="2936523" y="2274818"/>
+                  </a:lnTo>
+                  <a:lnTo>
+                    <a:pt x="2864901" y="2254896"/>
+                  </a:lnTo>
+                  <a:lnTo>
+                    <a:pt x="2793278" y="2234645"/>
+                  </a:lnTo>
+                  <a:lnTo>
+                    <a:pt x="2721655" y="2214060"/>
+                  </a:lnTo>
+                  <a:lnTo>
+                    <a:pt x="2650033" y="2193137"/>
+                  </a:lnTo>
+                  <a:lnTo>
+                    <a:pt x="2578410" y="2171868"/>
+                  </a:lnTo>
+                  <a:lnTo>
+                    <a:pt x="2506788" y="2150249"/>
+                  </a:lnTo>
+                  <a:lnTo>
+                    <a:pt x="2435165" y="2128274"/>
+                  </a:lnTo>
+                  <a:lnTo>
+                    <a:pt x="2363543" y="2105936"/>
+                  </a:lnTo>
+                  <a:lnTo>
+                    <a:pt x="2291920" y="2083231"/>
+                  </a:lnTo>
+                  <a:lnTo>
+                    <a:pt x="2220298" y="2060151"/>
+                  </a:lnTo>
+                  <a:lnTo>
+                    <a:pt x="2148675" y="2036691"/>
+                  </a:lnTo>
+                  <a:lnTo>
+                    <a:pt x="2077053" y="2012844"/>
+                  </a:lnTo>
+                  <a:lnTo>
+                    <a:pt x="2005430" y="1988604"/>
+                  </a:lnTo>
+                  <a:lnTo>
+                    <a:pt x="1933808" y="1963965"/>
+                  </a:lnTo>
+                  <a:lnTo>
+                    <a:pt x="1862185" y="1938920"/>
+                  </a:lnTo>
+                  <a:lnTo>
+                    <a:pt x="1790563" y="1913462"/>
+                  </a:lnTo>
+                  <a:lnTo>
+                    <a:pt x="1718940" y="1887585"/>
+                  </a:lnTo>
+                  <a:lnTo>
+                    <a:pt x="1647318" y="1861281"/>
+                  </a:lnTo>
+                  <a:lnTo>
+                    <a:pt x="1575695" y="1834543"/>
+                  </a:lnTo>
+                  <a:lnTo>
+                    <a:pt x="1504073" y="1807365"/>
+                  </a:lnTo>
+                  <a:lnTo>
+                    <a:pt x="1432450" y="1779739"/>
+                  </a:lnTo>
+                  <a:lnTo>
+                    <a:pt x="1360827" y="1751658"/>
+                  </a:lnTo>
+                  <a:lnTo>
+                    <a:pt x="1289205" y="1723114"/>
+                  </a:lnTo>
+                  <a:lnTo>
+                    <a:pt x="1217582" y="1694100"/>
+                  </a:lnTo>
+                  <a:lnTo>
+                    <a:pt x="1145960" y="1664608"/>
+                  </a:lnTo>
+                  <a:lnTo>
+                    <a:pt x="1074337" y="1634629"/>
+                  </a:lnTo>
+                  <a:lnTo>
+                    <a:pt x="1002715" y="1604157"/>
+                  </a:lnTo>
+                  <a:lnTo>
+                    <a:pt x="931092" y="1573182"/>
+                  </a:lnTo>
+                  <a:lnTo>
+                    <a:pt x="859470" y="1541697"/>
+                  </a:lnTo>
+                  <a:lnTo>
+                    <a:pt x="787847" y="1509693"/>
+                  </a:lnTo>
+                  <a:lnTo>
+                    <a:pt x="716225" y="1477162"/>
+                  </a:lnTo>
+                  <a:lnTo>
+                    <a:pt x="644602" y="1444094"/>
+                  </a:lnTo>
+                  <a:lnTo>
+                    <a:pt x="572980" y="1410482"/>
+                  </a:lnTo>
+                  <a:lnTo>
+                    <a:pt x="501357" y="1376315"/>
+                  </a:lnTo>
+                  <a:lnTo>
+                    <a:pt x="429735" y="1341586"/>
+                  </a:lnTo>
+                  <a:lnTo>
+                    <a:pt x="358112" y="1306284"/>
+                  </a:lnTo>
+                  <a:lnTo>
+                    <a:pt x="286490" y="1270401"/>
+                  </a:lnTo>
+                  <a:lnTo>
+                    <a:pt x="214867" y="1233926"/>
+                  </a:lnTo>
+                  <a:lnTo>
+                    <a:pt x="143245" y="1196850"/>
+                  </a:lnTo>
+                  <a:lnTo>
+                    <a:pt x="71622" y="1159163"/>
+                  </a:lnTo>
+                  <a:lnTo>
+                    <a:pt x="0" y="1120855"/>
                   </a:lnTo>
                   <a:lnTo>
                     <a:pt x="0" y="0"/>
@@ -3400,162 +3400,162 @@
           </p:nvSpPr>
           <p:spPr>
             <a:xfrm>
-              <a:off x="4797666" y="2073503"/>
-              <a:ext cx="3465012" cy="3015070"/>
+              <a:off x="4802244" y="2073503"/>
+              <a:ext cx="3460434" cy="3015277"/>
             </a:xfrm>
             <a:custGeom>
               <a:avLst/>
               <a:pathLst>
-                <a:path w="3465012" h="3015070">
+                <a:path w="3460434" h="3015277">
                   <a:moveTo>
                     <a:pt x="0" y="0"/>
                   </a:moveTo>
                   <a:lnTo>
-                    <a:pt x="27131" y="143061"/>
-                  </a:lnTo>
-                  <a:lnTo>
-                    <a:pt x="98754" y="482359"/>
-                  </a:lnTo>
-                  <a:lnTo>
-                    <a:pt x="170376" y="787196"/>
-                  </a:lnTo>
-                  <a:lnTo>
-                    <a:pt x="241999" y="1061073"/>
-                  </a:lnTo>
-                  <a:lnTo>
-                    <a:pt x="313621" y="1307133"/>
-                  </a:lnTo>
-                  <a:lnTo>
-                    <a:pt x="385244" y="1528201"/>
-                  </a:lnTo>
-                  <a:lnTo>
-                    <a:pt x="456866" y="1726817"/>
-                  </a:lnTo>
-                  <a:lnTo>
-                    <a:pt x="528489" y="1905260"/>
-                  </a:lnTo>
-                  <a:lnTo>
-                    <a:pt x="600111" y="2065580"/>
-                  </a:lnTo>
-                  <a:lnTo>
-                    <a:pt x="671734" y="2209617"/>
-                  </a:lnTo>
-                  <a:lnTo>
-                    <a:pt x="743356" y="2339024"/>
-                  </a:lnTo>
-                  <a:lnTo>
-                    <a:pt x="814979" y="2455288"/>
-                  </a:lnTo>
-                  <a:lnTo>
-                    <a:pt x="886602" y="2559744"/>
-                  </a:lnTo>
-                  <a:lnTo>
-                    <a:pt x="958224" y="2653591"/>
-                  </a:lnTo>
-                  <a:lnTo>
-                    <a:pt x="1029847" y="2667601"/>
-                  </a:lnTo>
-                  <a:lnTo>
-                    <a:pt x="1101469" y="2680808"/>
-                  </a:lnTo>
-                  <a:lnTo>
-                    <a:pt x="1173092" y="2693801"/>
-                  </a:lnTo>
-                  <a:lnTo>
-                    <a:pt x="1244714" y="2706584"/>
-                  </a:lnTo>
-                  <a:lnTo>
-                    <a:pt x="1316337" y="2719160"/>
-                  </a:lnTo>
-                  <a:lnTo>
-                    <a:pt x="1387959" y="2731532"/>
-                  </a:lnTo>
-                  <a:lnTo>
-                    <a:pt x="1459582" y="2743704"/>
-                  </a:lnTo>
-                  <a:lnTo>
-                    <a:pt x="1531204" y="2755679"/>
-                  </a:lnTo>
-                  <a:lnTo>
-                    <a:pt x="1602827" y="2767461"/>
-                  </a:lnTo>
-                  <a:lnTo>
-                    <a:pt x="1674449" y="2779052"/>
-                  </a:lnTo>
-                  <a:lnTo>
-                    <a:pt x="1746072" y="2790455"/>
-                  </a:lnTo>
-                  <a:lnTo>
-                    <a:pt x="1817694" y="2801673"/>
-                  </a:lnTo>
-                  <a:lnTo>
-                    <a:pt x="1889317" y="2812711"/>
-                  </a:lnTo>
-                  <a:lnTo>
-                    <a:pt x="1960939" y="2823569"/>
-                  </a:lnTo>
-                  <a:lnTo>
-                    <a:pt x="2032562" y="2834252"/>
-                  </a:lnTo>
-                  <a:lnTo>
-                    <a:pt x="2104184" y="2844762"/>
-                  </a:lnTo>
-                  <a:lnTo>
-                    <a:pt x="2175807" y="2855102"/>
-                  </a:lnTo>
-                  <a:lnTo>
-                    <a:pt x="2247430" y="2865274"/>
-                  </a:lnTo>
-                  <a:lnTo>
-                    <a:pt x="2319052" y="2875282"/>
-                  </a:lnTo>
-                  <a:lnTo>
-                    <a:pt x="2390675" y="2885128"/>
-                  </a:lnTo>
-                  <a:lnTo>
-                    <a:pt x="2462297" y="2894815"/>
-                  </a:lnTo>
-                  <a:lnTo>
-                    <a:pt x="2533920" y="2904345"/>
-                  </a:lnTo>
-                  <a:lnTo>
-                    <a:pt x="2605542" y="2913721"/>
-                  </a:lnTo>
-                  <a:lnTo>
-                    <a:pt x="2677165" y="2922945"/>
-                  </a:lnTo>
-                  <a:lnTo>
-                    <a:pt x="2748787" y="2932020"/>
-                  </a:lnTo>
-                  <a:lnTo>
-                    <a:pt x="2820410" y="2940947"/>
-                  </a:lnTo>
-                  <a:lnTo>
-                    <a:pt x="2892032" y="2949731"/>
-                  </a:lnTo>
-                  <a:lnTo>
-                    <a:pt x="2963655" y="2958372"/>
-                  </a:lnTo>
-                  <a:lnTo>
-                    <a:pt x="3035277" y="2966874"/>
-                  </a:lnTo>
-                  <a:lnTo>
-                    <a:pt x="3106900" y="2975238"/>
-                  </a:lnTo>
-                  <a:lnTo>
-                    <a:pt x="3178522" y="2983466"/>
-                  </a:lnTo>
-                  <a:lnTo>
-                    <a:pt x="3250145" y="2991562"/>
-                  </a:lnTo>
-                  <a:lnTo>
-                    <a:pt x="3321767" y="2999526"/>
-                  </a:lnTo>
-                  <a:lnTo>
-                    <a:pt x="3393390" y="3007362"/>
-                  </a:lnTo>
-                  <a:lnTo>
-                    <a:pt x="3465012" y="3015070"/>
+                    <a:pt x="22553" y="119981"/>
+                  </a:lnTo>
+                  <a:lnTo>
+                    <a:pt x="94175" y="462241"/>
+                  </a:lnTo>
+                  <a:lnTo>
+                    <a:pt x="165798" y="769676"/>
+                  </a:lnTo>
+                  <a:lnTo>
+                    <a:pt x="237420" y="1045829"/>
+                  </a:lnTo>
+                  <a:lnTo>
+                    <a:pt x="309043" y="1293885"/>
+                  </a:lnTo>
+                  <a:lnTo>
+                    <a:pt x="380665" y="1516701"/>
+                  </a:lnTo>
+                  <a:lnTo>
+                    <a:pt x="452288" y="1716845"/>
+                  </a:lnTo>
+                  <a:lnTo>
+                    <a:pt x="523910" y="1896625"/>
+                  </a:lnTo>
+                  <a:lnTo>
+                    <a:pt x="595533" y="2058113"/>
+                  </a:lnTo>
+                  <a:lnTo>
+                    <a:pt x="667155" y="2203170"/>
+                  </a:lnTo>
+                  <a:lnTo>
+                    <a:pt x="738778" y="2333467"/>
+                  </a:lnTo>
+                  <a:lnTo>
+                    <a:pt x="810400" y="2450507"/>
+                  </a:lnTo>
+                  <a:lnTo>
+                    <a:pt x="882023" y="2555638"/>
+                  </a:lnTo>
+                  <a:lnTo>
+                    <a:pt x="953646" y="2650072"/>
+                  </a:lnTo>
+                  <a:lnTo>
+                    <a:pt x="1025268" y="2667101"/>
+                  </a:lnTo>
+                  <a:lnTo>
+                    <a:pt x="1096891" y="2680340"/>
+                  </a:lnTo>
+                  <a:lnTo>
+                    <a:pt x="1168513" y="2693365"/>
+                  </a:lnTo>
+                  <a:lnTo>
+                    <a:pt x="1240136" y="2706179"/>
+                  </a:lnTo>
+                  <a:lnTo>
+                    <a:pt x="1311758" y="2718785"/>
+                  </a:lnTo>
+                  <a:lnTo>
+                    <a:pt x="1383381" y="2731187"/>
+                  </a:lnTo>
+                  <a:lnTo>
+                    <a:pt x="1455003" y="2743388"/>
+                  </a:lnTo>
+                  <a:lnTo>
+                    <a:pt x="1526626" y="2755391"/>
+                  </a:lnTo>
+                  <a:lnTo>
+                    <a:pt x="1598248" y="2767199"/>
+                  </a:lnTo>
+                  <a:lnTo>
+                    <a:pt x="1669871" y="2778816"/>
+                  </a:lnTo>
+                  <a:lnTo>
+                    <a:pt x="1741493" y="2790245"/>
+                  </a:lnTo>
+                  <a:lnTo>
+                    <a:pt x="1813116" y="2801488"/>
+                  </a:lnTo>
+                  <a:lnTo>
+                    <a:pt x="1884738" y="2812549"/>
+                  </a:lnTo>
+                  <a:lnTo>
+                    <a:pt x="1956361" y="2823431"/>
+                  </a:lnTo>
+                  <a:lnTo>
+                    <a:pt x="2027983" y="2834136"/>
+                  </a:lnTo>
+                  <a:lnTo>
+                    <a:pt x="2099606" y="2844668"/>
+                  </a:lnTo>
+                  <a:lnTo>
+                    <a:pt x="2171228" y="2855028"/>
+                  </a:lnTo>
+                  <a:lnTo>
+                    <a:pt x="2242851" y="2865221"/>
+                  </a:lnTo>
+                  <a:lnTo>
+                    <a:pt x="2314474" y="2875249"/>
+                  </a:lnTo>
+                  <a:lnTo>
+                    <a:pt x="2386096" y="2885114"/>
+                  </a:lnTo>
+                  <a:lnTo>
+                    <a:pt x="2457719" y="2894819"/>
+                  </a:lnTo>
+                  <a:lnTo>
+                    <a:pt x="2529341" y="2904367"/>
+                  </a:lnTo>
+                  <a:lnTo>
+                    <a:pt x="2600964" y="2913760"/>
+                  </a:lnTo>
+                  <a:lnTo>
+                    <a:pt x="2672586" y="2923001"/>
+                  </a:lnTo>
+                  <a:lnTo>
+                    <a:pt x="2744209" y="2932092"/>
+                  </a:lnTo>
+                  <a:lnTo>
+                    <a:pt x="2815831" y="2941036"/>
+                  </a:lnTo>
+                  <a:lnTo>
+                    <a:pt x="2887454" y="2949834"/>
+                  </a:lnTo>
+                  <a:lnTo>
+                    <a:pt x="2959076" y="2958490"/>
+                  </a:lnTo>
+                  <a:lnTo>
+                    <a:pt x="3030699" y="2967006"/>
+                  </a:lnTo>
+                  <a:lnTo>
+                    <a:pt x="3102321" y="2975383"/>
+                  </a:lnTo>
+                  <a:lnTo>
+                    <a:pt x="3173944" y="2983625"/>
+                  </a:lnTo>
+                  <a:lnTo>
+                    <a:pt x="3245566" y="2991733"/>
+                  </a:lnTo>
+                  <a:lnTo>
+                    <a:pt x="3317189" y="2999710"/>
+                  </a:lnTo>
+                  <a:lnTo>
+                    <a:pt x="3388811" y="3007557"/>
+                  </a:lnTo>
+                  <a:lnTo>
+                    <a:pt x="3460434" y="3015277"/>
                   </a:lnTo>
                 </a:path>
               </a:pathLst>
@@ -3575,309 +3575,309 @@
           </p:nvSpPr>
           <p:spPr>
             <a:xfrm>
-              <a:off x="1172049" y="3200567"/>
-              <a:ext cx="7090630" cy="2337130"/>
+              <a:off x="1172049" y="3194359"/>
+              <a:ext cx="7090630" cy="2343396"/>
             </a:xfrm>
             <a:custGeom>
               <a:avLst/>
               <a:pathLst>
-                <a:path w="7090630" h="2337130">
+                <a:path w="7090630" h="2343396">
                   <a:moveTo>
-                    <a:pt x="7090630" y="2337130"/>
+                    <a:pt x="7090630" y="2343396"/>
                   </a:moveTo>
                   <a:lnTo>
-                    <a:pt x="7019007" y="2334920"/>
-                  </a:lnTo>
-                  <a:lnTo>
-                    <a:pt x="6947385" y="2332460"/>
-                  </a:lnTo>
-                  <a:lnTo>
-                    <a:pt x="6875762" y="2329722"/>
-                  </a:lnTo>
-                  <a:lnTo>
-                    <a:pt x="6804139" y="2326674"/>
-                  </a:lnTo>
-                  <a:lnTo>
-                    <a:pt x="6732517" y="2323281"/>
-                  </a:lnTo>
-                  <a:lnTo>
-                    <a:pt x="6660894" y="2319506"/>
-                  </a:lnTo>
-                  <a:lnTo>
-                    <a:pt x="6589272" y="2315303"/>
-                  </a:lnTo>
-                  <a:lnTo>
-                    <a:pt x="6517649" y="2310625"/>
-                  </a:lnTo>
-                  <a:lnTo>
-                    <a:pt x="6446027" y="2305419"/>
-                  </a:lnTo>
-                  <a:lnTo>
-                    <a:pt x="6374404" y="2299623"/>
-                  </a:lnTo>
-                  <a:lnTo>
-                    <a:pt x="6302782" y="2293173"/>
-                  </a:lnTo>
-                  <a:lnTo>
-                    <a:pt x="6231159" y="2285994"/>
-                  </a:lnTo>
-                  <a:lnTo>
-                    <a:pt x="6159537" y="2278002"/>
-                  </a:lnTo>
-                  <a:lnTo>
-                    <a:pt x="6087914" y="2269108"/>
-                  </a:lnTo>
-                  <a:lnTo>
-                    <a:pt x="6016292" y="2259208"/>
-                  </a:lnTo>
-                  <a:lnTo>
-                    <a:pt x="5944669" y="2248189"/>
-                  </a:lnTo>
-                  <a:lnTo>
-                    <a:pt x="5873047" y="2235924"/>
-                  </a:lnTo>
-                  <a:lnTo>
-                    <a:pt x="5801424" y="2222273"/>
-                  </a:lnTo>
-                  <a:lnTo>
-                    <a:pt x="5729802" y="2207078"/>
-                  </a:lnTo>
-                  <a:lnTo>
-                    <a:pt x="5658179" y="2190166"/>
-                  </a:lnTo>
-                  <a:lnTo>
-                    <a:pt x="5586557" y="2171342"/>
-                  </a:lnTo>
-                  <a:lnTo>
-                    <a:pt x="5514934" y="2150389"/>
-                  </a:lnTo>
-                  <a:lnTo>
-                    <a:pt x="5443311" y="2127069"/>
-                  </a:lnTo>
-                  <a:lnTo>
-                    <a:pt x="5371689" y="2101112"/>
-                  </a:lnTo>
-                  <a:lnTo>
-                    <a:pt x="5300066" y="2072220"/>
-                  </a:lnTo>
-                  <a:lnTo>
-                    <a:pt x="5228444" y="2040063"/>
-                  </a:lnTo>
-                  <a:lnTo>
-                    <a:pt x="5156821" y="2004270"/>
-                  </a:lnTo>
-                  <a:lnTo>
-                    <a:pt x="5085199" y="1964430"/>
-                  </a:lnTo>
-                  <a:lnTo>
-                    <a:pt x="5013576" y="1920088"/>
-                  </a:lnTo>
-                  <a:lnTo>
-                    <a:pt x="4941954" y="1870732"/>
-                  </a:lnTo>
-                  <a:lnTo>
-                    <a:pt x="4870331" y="1815797"/>
-                  </a:lnTo>
-                  <a:lnTo>
-                    <a:pt x="4798709" y="1754651"/>
-                  </a:lnTo>
-                  <a:lnTo>
-                    <a:pt x="4727086" y="1686593"/>
-                  </a:lnTo>
-                  <a:lnTo>
-                    <a:pt x="4655464" y="1610842"/>
-                  </a:lnTo>
-                  <a:lnTo>
-                    <a:pt x="4583841" y="1527113"/>
-                  </a:lnTo>
-                  <a:lnTo>
-                    <a:pt x="4512219" y="1513468"/>
-                  </a:lnTo>
-                  <a:lnTo>
-                    <a:pt x="4440596" y="1499599"/>
-                  </a:lnTo>
-                  <a:lnTo>
-                    <a:pt x="4368974" y="1485502"/>
-                  </a:lnTo>
-                  <a:lnTo>
-                    <a:pt x="4297351" y="1471173"/>
-                  </a:lnTo>
-                  <a:lnTo>
-                    <a:pt x="4225729" y="1456608"/>
-                  </a:lnTo>
-                  <a:lnTo>
-                    <a:pt x="4154106" y="1441804"/>
-                  </a:lnTo>
-                  <a:lnTo>
-                    <a:pt x="4082483" y="1426756"/>
-                  </a:lnTo>
-                  <a:lnTo>
-                    <a:pt x="4010861" y="1411461"/>
-                  </a:lnTo>
-                  <a:lnTo>
-                    <a:pt x="3939238" y="1395914"/>
-                  </a:lnTo>
-                  <a:lnTo>
-                    <a:pt x="3867616" y="1380111"/>
-                  </a:lnTo>
-                  <a:lnTo>
-                    <a:pt x="3795993" y="1364048"/>
-                  </a:lnTo>
-                  <a:lnTo>
-                    <a:pt x="3724371" y="1347722"/>
-                  </a:lnTo>
-                  <a:lnTo>
-                    <a:pt x="3652748" y="1331126"/>
-                  </a:lnTo>
-                  <a:lnTo>
-                    <a:pt x="3581126" y="1314258"/>
-                  </a:lnTo>
-                  <a:lnTo>
-                    <a:pt x="3509503" y="1297112"/>
-                  </a:lnTo>
-                  <a:lnTo>
-                    <a:pt x="3437881" y="1279685"/>
-                  </a:lnTo>
-                  <a:lnTo>
-                    <a:pt x="3366258" y="1261970"/>
-                  </a:lnTo>
-                  <a:lnTo>
-                    <a:pt x="3294636" y="1243965"/>
-                  </a:lnTo>
-                  <a:lnTo>
-                    <a:pt x="3223013" y="1225663"/>
-                  </a:lnTo>
-                  <a:lnTo>
-                    <a:pt x="3151391" y="1207060"/>
-                  </a:lnTo>
-                  <a:lnTo>
-                    <a:pt x="3079768" y="1188151"/>
-                  </a:lnTo>
-                  <a:lnTo>
-                    <a:pt x="3008146" y="1168931"/>
-                  </a:lnTo>
-                  <a:lnTo>
-                    <a:pt x="2936523" y="1149395"/>
-                  </a:lnTo>
-                  <a:lnTo>
-                    <a:pt x="2864901" y="1129537"/>
-                  </a:lnTo>
-                  <a:lnTo>
-                    <a:pt x="2793278" y="1109353"/>
-                  </a:lnTo>
-                  <a:lnTo>
-                    <a:pt x="2721655" y="1088838"/>
-                  </a:lnTo>
-                  <a:lnTo>
-                    <a:pt x="2650033" y="1067984"/>
-                  </a:lnTo>
-                  <a:lnTo>
-                    <a:pt x="2578410" y="1046788"/>
-                  </a:lnTo>
-                  <a:lnTo>
-                    <a:pt x="2506788" y="1025243"/>
-                  </a:lnTo>
-                  <a:lnTo>
-                    <a:pt x="2435165" y="1003343"/>
-                  </a:lnTo>
-                  <a:lnTo>
-                    <a:pt x="2363543" y="981084"/>
-                  </a:lnTo>
-                  <a:lnTo>
-                    <a:pt x="2291920" y="958458"/>
-                  </a:lnTo>
-                  <a:lnTo>
-                    <a:pt x="2220298" y="935460"/>
-                  </a:lnTo>
-                  <a:lnTo>
-                    <a:pt x="2148675" y="912084"/>
-                  </a:lnTo>
-                  <a:lnTo>
-                    <a:pt x="2077053" y="888323"/>
-                  </a:lnTo>
-                  <a:lnTo>
-                    <a:pt x="2005430" y="864172"/>
-                  </a:lnTo>
-                  <a:lnTo>
-                    <a:pt x="1933808" y="839623"/>
-                  </a:lnTo>
-                  <a:lnTo>
-                    <a:pt x="1862185" y="814671"/>
-                  </a:lnTo>
-                  <a:lnTo>
-                    <a:pt x="1790563" y="789308"/>
-                  </a:lnTo>
-                  <a:lnTo>
-                    <a:pt x="1718940" y="763528"/>
-                  </a:lnTo>
-                  <a:lnTo>
-                    <a:pt x="1647318" y="737324"/>
-                  </a:lnTo>
-                  <a:lnTo>
-                    <a:pt x="1575695" y="710688"/>
-                  </a:lnTo>
-                  <a:lnTo>
-                    <a:pt x="1504073" y="683615"/>
-                  </a:lnTo>
-                  <a:lnTo>
-                    <a:pt x="1432450" y="656097"/>
-                  </a:lnTo>
-                  <a:lnTo>
-                    <a:pt x="1360827" y="628126"/>
-                  </a:lnTo>
-                  <a:lnTo>
-                    <a:pt x="1289205" y="599695"/>
-                  </a:lnTo>
-                  <a:lnTo>
-                    <a:pt x="1217582" y="570796"/>
-                  </a:lnTo>
-                  <a:lnTo>
-                    <a:pt x="1145960" y="541422"/>
-                  </a:lnTo>
-                  <a:lnTo>
-                    <a:pt x="1074337" y="511564"/>
-                  </a:lnTo>
-                  <a:lnTo>
-                    <a:pt x="1002715" y="481216"/>
-                  </a:lnTo>
-                  <a:lnTo>
-                    <a:pt x="931092" y="450368"/>
-                  </a:lnTo>
-                  <a:lnTo>
-                    <a:pt x="859470" y="419014"/>
-                  </a:lnTo>
-                  <a:lnTo>
-                    <a:pt x="787847" y="387143"/>
-                  </a:lnTo>
-                  <a:lnTo>
-                    <a:pt x="716225" y="354748"/>
-                  </a:lnTo>
-                  <a:lnTo>
-                    <a:pt x="644602" y="321820"/>
-                  </a:lnTo>
-                  <a:lnTo>
-                    <a:pt x="572980" y="288351"/>
-                  </a:lnTo>
-                  <a:lnTo>
-                    <a:pt x="501357" y="254331"/>
-                  </a:lnTo>
-                  <a:lnTo>
-                    <a:pt x="429735" y="219752"/>
-                  </a:lnTo>
-                  <a:lnTo>
-                    <a:pt x="358112" y="184604"/>
-                  </a:lnTo>
-                  <a:lnTo>
-                    <a:pt x="286490" y="148878"/>
-                  </a:lnTo>
-                  <a:lnTo>
-                    <a:pt x="214867" y="112564"/>
-                  </a:lnTo>
-                  <a:lnTo>
-                    <a:pt x="143245" y="75653"/>
-                  </a:lnTo>
-                  <a:lnTo>
-                    <a:pt x="71622" y="38135"/>
+                    <a:pt x="7019007" y="2341187"/>
+                  </a:lnTo>
+                  <a:lnTo>
+                    <a:pt x="6947385" y="2338729"/>
+                  </a:lnTo>
+                  <a:lnTo>
+                    <a:pt x="6875762" y="2335992"/>
+                  </a:lnTo>
+                  <a:lnTo>
+                    <a:pt x="6804139" y="2332945"/>
+                  </a:lnTo>
+                  <a:lnTo>
+                    <a:pt x="6732517" y="2329553"/>
+                  </a:lnTo>
+                  <a:lnTo>
+                    <a:pt x="6660894" y="2325777"/>
+                  </a:lnTo>
+                  <a:lnTo>
+                    <a:pt x="6589272" y="2321573"/>
+                  </a:lnTo>
+                  <a:lnTo>
+                    <a:pt x="6517649" y="2316893"/>
+                  </a:lnTo>
+                  <a:lnTo>
+                    <a:pt x="6446027" y="2311682"/>
+                  </a:lnTo>
+                  <a:lnTo>
+                    <a:pt x="6374404" y="2305882"/>
+                  </a:lnTo>
+                  <a:lnTo>
+                    <a:pt x="6302782" y="2299424"/>
+                  </a:lnTo>
+                  <a:lnTo>
+                    <a:pt x="6231159" y="2292235"/>
+                  </a:lnTo>
+                  <a:lnTo>
+                    <a:pt x="6159537" y="2284232"/>
+                  </a:lnTo>
+                  <a:lnTo>
+                    <a:pt x="6087914" y="2275322"/>
+                  </a:lnTo>
+                  <a:lnTo>
+                    <a:pt x="6016292" y="2265402"/>
+                  </a:lnTo>
+                  <a:lnTo>
+                    <a:pt x="5944669" y="2254359"/>
+                  </a:lnTo>
+                  <a:lnTo>
+                    <a:pt x="5873047" y="2242065"/>
+                  </a:lnTo>
+                  <a:lnTo>
+                    <a:pt x="5801424" y="2228379"/>
+                  </a:lnTo>
+                  <a:lnTo>
+                    <a:pt x="5729802" y="2213142"/>
+                  </a:lnTo>
+                  <a:lnTo>
+                    <a:pt x="5658179" y="2196180"/>
+                  </a:lnTo>
+                  <a:lnTo>
+                    <a:pt x="5586557" y="2177296"/>
+                  </a:lnTo>
+                  <a:lnTo>
+                    <a:pt x="5514934" y="2156273"/>
+                  </a:lnTo>
+                  <a:lnTo>
+                    <a:pt x="5443311" y="2132868"/>
+                  </a:lnTo>
+                  <a:lnTo>
+                    <a:pt x="5371689" y="2106812"/>
+                  </a:lnTo>
+                  <a:lnTo>
+                    <a:pt x="5300066" y="2077805"/>
+                  </a:lnTo>
+                  <a:lnTo>
+                    <a:pt x="5228444" y="2045513"/>
+                  </a:lnTo>
+                  <a:lnTo>
+                    <a:pt x="5156821" y="2009562"/>
+                  </a:lnTo>
+                  <a:lnTo>
+                    <a:pt x="5085199" y="1969539"/>
+                  </a:lnTo>
+                  <a:lnTo>
+                    <a:pt x="5013576" y="1924982"/>
+                  </a:lnTo>
+                  <a:lnTo>
+                    <a:pt x="4941954" y="1875378"/>
+                  </a:lnTo>
+                  <a:lnTo>
+                    <a:pt x="4870331" y="1820156"/>
+                  </a:lnTo>
+                  <a:lnTo>
+                    <a:pt x="4798709" y="1758678"/>
+                  </a:lnTo>
+                  <a:lnTo>
+                    <a:pt x="4727086" y="1690236"/>
+                  </a:lnTo>
+                  <a:lnTo>
+                    <a:pt x="4655464" y="1614041"/>
+                  </a:lnTo>
+                  <a:lnTo>
+                    <a:pt x="4583841" y="1532787"/>
+                  </a:lnTo>
+                  <a:lnTo>
+                    <a:pt x="4512219" y="1519107"/>
+                  </a:lnTo>
+                  <a:lnTo>
+                    <a:pt x="4440596" y="1505202"/>
+                  </a:lnTo>
+                  <a:lnTo>
+                    <a:pt x="4368974" y="1491068"/>
+                  </a:lnTo>
+                  <a:lnTo>
+                    <a:pt x="4297351" y="1476701"/>
+                  </a:lnTo>
+                  <a:lnTo>
+                    <a:pt x="4225729" y="1462097"/>
+                  </a:lnTo>
+                  <a:lnTo>
+                    <a:pt x="4154106" y="1447252"/>
+                  </a:lnTo>
+                  <a:lnTo>
+                    <a:pt x="4082483" y="1432163"/>
+                  </a:lnTo>
+                  <a:lnTo>
+                    <a:pt x="4010861" y="1416825"/>
+                  </a:lnTo>
+                  <a:lnTo>
+                    <a:pt x="3939238" y="1401234"/>
+                  </a:lnTo>
+                  <a:lnTo>
+                    <a:pt x="3867616" y="1385387"/>
+                  </a:lnTo>
+                  <a:lnTo>
+                    <a:pt x="3795993" y="1369278"/>
+                  </a:lnTo>
+                  <a:lnTo>
+                    <a:pt x="3724371" y="1352904"/>
+                  </a:lnTo>
+                  <a:lnTo>
+                    <a:pt x="3652748" y="1336260"/>
+                  </a:lnTo>
+                  <a:lnTo>
+                    <a:pt x="3581126" y="1319341"/>
+                  </a:lnTo>
+                  <a:lnTo>
+                    <a:pt x="3509503" y="1302144"/>
+                  </a:lnTo>
+                  <a:lnTo>
+                    <a:pt x="3437881" y="1284664"/>
+                  </a:lnTo>
+                  <a:lnTo>
+                    <a:pt x="3366258" y="1266895"/>
+                  </a:lnTo>
+                  <a:lnTo>
+                    <a:pt x="3294636" y="1248833"/>
+                  </a:lnTo>
+                  <a:lnTo>
+                    <a:pt x="3223013" y="1230474"/>
+                  </a:lnTo>
+                  <a:lnTo>
+                    <a:pt x="3151391" y="1211813"/>
+                  </a:lnTo>
+                  <a:lnTo>
+                    <a:pt x="3079768" y="1192844"/>
+                  </a:lnTo>
+                  <a:lnTo>
+                    <a:pt x="3008146" y="1173562"/>
+                  </a:lnTo>
+                  <a:lnTo>
+                    <a:pt x="2936523" y="1153962"/>
+                  </a:lnTo>
+                  <a:lnTo>
+                    <a:pt x="2864901" y="1134040"/>
+                  </a:lnTo>
+                  <a:lnTo>
+                    <a:pt x="2793278" y="1113789"/>
+                  </a:lnTo>
+                  <a:lnTo>
+                    <a:pt x="2721655" y="1093204"/>
+                  </a:lnTo>
+                  <a:lnTo>
+                    <a:pt x="2650033" y="1072281"/>
+                  </a:lnTo>
+                  <a:lnTo>
+                    <a:pt x="2578410" y="1051012"/>
+                  </a:lnTo>
+                  <a:lnTo>
+                    <a:pt x="2506788" y="1029393"/>
+                  </a:lnTo>
+                  <a:lnTo>
+                    <a:pt x="2435165" y="1007418"/>
+                  </a:lnTo>
+                  <a:lnTo>
+                    <a:pt x="2363543" y="985080"/>
+                  </a:lnTo>
+                  <a:lnTo>
+                    <a:pt x="2291920" y="962375"/>
+                  </a:lnTo>
+                  <a:lnTo>
+                    <a:pt x="2220298" y="939295"/>
+                  </a:lnTo>
+                  <a:lnTo>
+                    <a:pt x="2148675" y="915835"/>
+                  </a:lnTo>
+                  <a:lnTo>
+                    <a:pt x="2077053" y="891988"/>
+                  </a:lnTo>
+                  <a:lnTo>
+                    <a:pt x="2005430" y="867748"/>
+                  </a:lnTo>
+                  <a:lnTo>
+                    <a:pt x="1933808" y="843109"/>
+                  </a:lnTo>
+                  <a:lnTo>
+                    <a:pt x="1862185" y="818064"/>
+                  </a:lnTo>
+                  <a:lnTo>
+                    <a:pt x="1790563" y="792606"/>
+                  </a:lnTo>
+                  <a:lnTo>
+                    <a:pt x="1718940" y="766729"/>
+                  </a:lnTo>
+                  <a:lnTo>
+                    <a:pt x="1647318" y="740425"/>
+                  </a:lnTo>
+                  <a:lnTo>
+                    <a:pt x="1575695" y="713687"/>
+                  </a:lnTo>
+                  <a:lnTo>
+                    <a:pt x="1504073" y="686509"/>
+                  </a:lnTo>
+                  <a:lnTo>
+                    <a:pt x="1432450" y="658883"/>
+                  </a:lnTo>
+                  <a:lnTo>
+                    <a:pt x="1360827" y="630802"/>
+                  </a:lnTo>
+                  <a:lnTo>
+                    <a:pt x="1289205" y="602258"/>
+                  </a:lnTo>
+                  <a:lnTo>
+                    <a:pt x="1217582" y="573244"/>
+                  </a:lnTo>
+                  <a:lnTo>
+                    <a:pt x="1145960" y="543752"/>
+                  </a:lnTo>
+                  <a:lnTo>
+                    <a:pt x="1074337" y="513773"/>
+                  </a:lnTo>
+                  <a:lnTo>
+                    <a:pt x="1002715" y="483301"/>
+                  </a:lnTo>
+                  <a:lnTo>
+                    <a:pt x="931092" y="452326"/>
+                  </a:lnTo>
+                  <a:lnTo>
+                    <a:pt x="859470" y="420841"/>
+                  </a:lnTo>
+                  <a:lnTo>
+                    <a:pt x="787847" y="388837"/>
+                  </a:lnTo>
+                  <a:lnTo>
+                    <a:pt x="716225" y="356306"/>
+                  </a:lnTo>
+                  <a:lnTo>
+                    <a:pt x="644602" y="323238"/>
+                  </a:lnTo>
+                  <a:lnTo>
+                    <a:pt x="572980" y="289626"/>
+                  </a:lnTo>
+                  <a:lnTo>
+                    <a:pt x="501357" y="255459"/>
+                  </a:lnTo>
+                  <a:lnTo>
+                    <a:pt x="429735" y="220730"/>
+                  </a:lnTo>
+                  <a:lnTo>
+                    <a:pt x="358112" y="185428"/>
+                  </a:lnTo>
+                  <a:lnTo>
+                    <a:pt x="286490" y="149545"/>
+                  </a:lnTo>
+                  <a:lnTo>
+                    <a:pt x="214867" y="113070"/>
+                  </a:lnTo>
+                  <a:lnTo>
+                    <a:pt x="143245" y="75994"/>
+                  </a:lnTo>
+                  <a:lnTo>
+                    <a:pt x="71622" y="38307"/>
                   </a:lnTo>
                   <a:lnTo>
                     <a:pt x="0" y="0"/>
@@ -3900,192 +3900,192 @@
           </p:nvSpPr>
           <p:spPr>
             <a:xfrm>
-              <a:off x="4091195" y="2073503"/>
-              <a:ext cx="4171484" cy="3388021"/>
+              <a:off x="4097078" y="2073503"/>
+              <a:ext cx="4165600" cy="3388181"/>
             </a:xfrm>
             <a:custGeom>
               <a:avLst/>
               <a:pathLst>
-                <a:path w="4171484" h="3388021">
+                <a:path w="4165600" h="3388181">
                   <a:moveTo>
                     <a:pt x="0" y="0"/>
                   </a:moveTo>
                   <a:lnTo>
-                    <a:pt x="17377" y="52983"/>
-                  </a:lnTo>
-                  <a:lnTo>
-                    <a:pt x="89000" y="258288"/>
-                  </a:lnTo>
-                  <a:lnTo>
-                    <a:pt x="160622" y="451307"/>
-                  </a:lnTo>
-                  <a:lnTo>
-                    <a:pt x="232245" y="632775"/>
-                  </a:lnTo>
-                  <a:lnTo>
-                    <a:pt x="303867" y="803384"/>
-                  </a:lnTo>
-                  <a:lnTo>
-                    <a:pt x="375490" y="963784"/>
-                  </a:lnTo>
-                  <a:lnTo>
-                    <a:pt x="447112" y="1114584"/>
-                  </a:lnTo>
-                  <a:lnTo>
-                    <a:pt x="518735" y="1256361"/>
-                  </a:lnTo>
-                  <a:lnTo>
-                    <a:pt x="590357" y="1389653"/>
-                  </a:lnTo>
-                  <a:lnTo>
-                    <a:pt x="661980" y="1514968"/>
-                  </a:lnTo>
-                  <a:lnTo>
-                    <a:pt x="733602" y="1632785"/>
-                  </a:lnTo>
-                  <a:lnTo>
-                    <a:pt x="805225" y="1743551"/>
-                  </a:lnTo>
-                  <a:lnTo>
-                    <a:pt x="876847" y="1847688"/>
-                  </a:lnTo>
-                  <a:lnTo>
-                    <a:pt x="948470" y="1945594"/>
-                  </a:lnTo>
-                  <a:lnTo>
-                    <a:pt x="1020092" y="2037641"/>
-                  </a:lnTo>
-                  <a:lnTo>
-                    <a:pt x="1091715" y="2124179"/>
-                  </a:lnTo>
-                  <a:lnTo>
-                    <a:pt x="1163337" y="2205539"/>
-                  </a:lnTo>
-                  <a:lnTo>
-                    <a:pt x="1234960" y="2282030"/>
-                  </a:lnTo>
-                  <a:lnTo>
-                    <a:pt x="1306582" y="2353944"/>
-                  </a:lnTo>
-                  <a:lnTo>
-                    <a:pt x="1378205" y="2421554"/>
-                  </a:lnTo>
-                  <a:lnTo>
-                    <a:pt x="1449828" y="2485118"/>
-                  </a:lnTo>
-                  <a:lnTo>
-                    <a:pt x="1521450" y="2544878"/>
-                  </a:lnTo>
-                  <a:lnTo>
-                    <a:pt x="1593073" y="2601062"/>
-                  </a:lnTo>
-                  <a:lnTo>
-                    <a:pt x="1664695" y="2653884"/>
-                  </a:lnTo>
-                  <a:lnTo>
-                    <a:pt x="1736318" y="2703545"/>
-                  </a:lnTo>
-                  <a:lnTo>
-                    <a:pt x="1807940" y="2750234"/>
-                  </a:lnTo>
-                  <a:lnTo>
-                    <a:pt x="1879563" y="2794129"/>
-                  </a:lnTo>
-                  <a:lnTo>
-                    <a:pt x="1951185" y="2835398"/>
-                  </a:lnTo>
-                  <a:lnTo>
-                    <a:pt x="2022808" y="2874197"/>
-                  </a:lnTo>
-                  <a:lnTo>
-                    <a:pt x="2094430" y="2910673"/>
-                  </a:lnTo>
-                  <a:lnTo>
-                    <a:pt x="2166053" y="2944968"/>
-                  </a:lnTo>
-                  <a:lnTo>
-                    <a:pt x="2237675" y="2977209"/>
-                  </a:lnTo>
-                  <a:lnTo>
-                    <a:pt x="2309298" y="3007522"/>
-                  </a:lnTo>
-                  <a:lnTo>
-                    <a:pt x="2380920" y="3036020"/>
-                  </a:lnTo>
-                  <a:lnTo>
-                    <a:pt x="2452543" y="3062813"/>
-                  </a:lnTo>
-                  <a:lnTo>
-                    <a:pt x="2524165" y="3088003"/>
-                  </a:lnTo>
-                  <a:lnTo>
-                    <a:pt x="2595788" y="3111685"/>
-                  </a:lnTo>
-                  <a:lnTo>
-                    <a:pt x="2667410" y="3133950"/>
-                  </a:lnTo>
-                  <a:lnTo>
-                    <a:pt x="2739033" y="3154883"/>
-                  </a:lnTo>
-                  <a:lnTo>
-                    <a:pt x="2810656" y="3174563"/>
-                  </a:lnTo>
-                  <a:lnTo>
-                    <a:pt x="2882278" y="3193065"/>
-                  </a:lnTo>
-                  <a:lnTo>
-                    <a:pt x="2953901" y="3210460"/>
-                  </a:lnTo>
-                  <a:lnTo>
-                    <a:pt x="3025523" y="3226814"/>
-                  </a:lnTo>
-                  <a:lnTo>
-                    <a:pt x="3097146" y="3242190"/>
-                  </a:lnTo>
-                  <a:lnTo>
-                    <a:pt x="3168768" y="3256645"/>
-                  </a:lnTo>
-                  <a:lnTo>
-                    <a:pt x="3240391" y="3270235"/>
-                  </a:lnTo>
-                  <a:lnTo>
-                    <a:pt x="3312013" y="3283012"/>
-                  </a:lnTo>
-                  <a:lnTo>
-                    <a:pt x="3383636" y="3295025"/>
-                  </a:lnTo>
-                  <a:lnTo>
-                    <a:pt x="3455258" y="3306318"/>
-                  </a:lnTo>
-                  <a:lnTo>
-                    <a:pt x="3526881" y="3316936"/>
-                  </a:lnTo>
-                  <a:lnTo>
-                    <a:pt x="3598503" y="3326918"/>
-                  </a:lnTo>
-                  <a:lnTo>
-                    <a:pt x="3670126" y="3336303"/>
-                  </a:lnTo>
-                  <a:lnTo>
-                    <a:pt x="3741748" y="3345127"/>
-                  </a:lnTo>
-                  <a:lnTo>
-                    <a:pt x="3813371" y="3353422"/>
-                  </a:lnTo>
-                  <a:lnTo>
-                    <a:pt x="3884993" y="3361221"/>
-                  </a:lnTo>
-                  <a:lnTo>
-                    <a:pt x="3956616" y="3368553"/>
-                  </a:lnTo>
-                  <a:lnTo>
-                    <a:pt x="4028238" y="3375447"/>
-                  </a:lnTo>
-                  <a:lnTo>
-                    <a:pt x="4099861" y="3381928"/>
-                  </a:lnTo>
-                  <a:lnTo>
-                    <a:pt x="4171484" y="3388021"/>
+                    <a:pt x="11494" y="35294"/>
+                  </a:lnTo>
+                  <a:lnTo>
+                    <a:pt x="83116" y="242039"/>
+                  </a:lnTo>
+                  <a:lnTo>
+                    <a:pt x="154739" y="436389"/>
+                  </a:lnTo>
+                  <a:lnTo>
+                    <a:pt x="226361" y="619087"/>
+                  </a:lnTo>
+                  <a:lnTo>
+                    <a:pt x="297984" y="790832"/>
+                  </a:lnTo>
+                  <a:lnTo>
+                    <a:pt x="369606" y="952280"/>
+                  </a:lnTo>
+                  <a:lnTo>
+                    <a:pt x="441229" y="1104049"/>
+                  </a:lnTo>
+                  <a:lnTo>
+                    <a:pt x="512851" y="1246719"/>
+                  </a:lnTo>
+                  <a:lnTo>
+                    <a:pt x="584474" y="1380836"/>
+                  </a:lnTo>
+                  <a:lnTo>
+                    <a:pt x="656096" y="1506912"/>
+                  </a:lnTo>
+                  <a:lnTo>
+                    <a:pt x="727719" y="1625429"/>
+                  </a:lnTo>
+                  <a:lnTo>
+                    <a:pt x="799341" y="1736840"/>
+                  </a:lnTo>
+                  <a:lnTo>
+                    <a:pt x="870964" y="1841573"/>
+                  </a:lnTo>
+                  <a:lnTo>
+                    <a:pt x="942586" y="1940026"/>
+                  </a:lnTo>
+                  <a:lnTo>
+                    <a:pt x="1014209" y="2032576"/>
+                  </a:lnTo>
+                  <a:lnTo>
+                    <a:pt x="1085832" y="2119578"/>
+                  </a:lnTo>
+                  <a:lnTo>
+                    <a:pt x="1157454" y="2201364"/>
+                  </a:lnTo>
+                  <a:lnTo>
+                    <a:pt x="1229077" y="2278247"/>
+                  </a:lnTo>
+                  <a:lnTo>
+                    <a:pt x="1300699" y="2350520"/>
+                  </a:lnTo>
+                  <a:lnTo>
+                    <a:pt x="1372322" y="2418461"/>
+                  </a:lnTo>
+                  <a:lnTo>
+                    <a:pt x="1443944" y="2482328"/>
+                  </a:lnTo>
+                  <a:lnTo>
+                    <a:pt x="1515567" y="2542366"/>
+                  </a:lnTo>
+                  <a:lnTo>
+                    <a:pt x="1587189" y="2598804"/>
+                  </a:lnTo>
+                  <a:lnTo>
+                    <a:pt x="1658812" y="2651859"/>
+                  </a:lnTo>
+                  <a:lnTo>
+                    <a:pt x="1730434" y="2701733"/>
+                  </a:lnTo>
+                  <a:lnTo>
+                    <a:pt x="1802057" y="2748617"/>
+                  </a:lnTo>
+                  <a:lnTo>
+                    <a:pt x="1873679" y="2792690"/>
+                  </a:lnTo>
+                  <a:lnTo>
+                    <a:pt x="1945302" y="2834121"/>
+                  </a:lnTo>
+                  <a:lnTo>
+                    <a:pt x="2016924" y="2873068"/>
+                  </a:lnTo>
+                  <a:lnTo>
+                    <a:pt x="2088547" y="2909680"/>
+                  </a:lnTo>
+                  <a:lnTo>
+                    <a:pt x="2160169" y="2944097"/>
+                  </a:lnTo>
+                  <a:lnTo>
+                    <a:pt x="2231792" y="2976451"/>
+                  </a:lnTo>
+                  <a:lnTo>
+                    <a:pt x="2303414" y="3006865"/>
+                  </a:lnTo>
+                  <a:lnTo>
+                    <a:pt x="2375037" y="3035455"/>
+                  </a:lnTo>
+                  <a:lnTo>
+                    <a:pt x="2446660" y="3062332"/>
+                  </a:lnTo>
+                  <a:lnTo>
+                    <a:pt x="2518282" y="3087597"/>
+                  </a:lnTo>
+                  <a:lnTo>
+                    <a:pt x="2589905" y="3111347"/>
+                  </a:lnTo>
+                  <a:lnTo>
+                    <a:pt x="2661527" y="3133673"/>
+                  </a:lnTo>
+                  <a:lnTo>
+                    <a:pt x="2733150" y="3154661"/>
+                  </a:lnTo>
+                  <a:lnTo>
+                    <a:pt x="2804772" y="3174391"/>
+                  </a:lnTo>
+                  <a:lnTo>
+                    <a:pt x="2876395" y="3192938"/>
+                  </a:lnTo>
+                  <a:lnTo>
+                    <a:pt x="2948017" y="3210373"/>
+                  </a:lnTo>
+                  <a:lnTo>
+                    <a:pt x="3019640" y="3226762"/>
+                  </a:lnTo>
+                  <a:lnTo>
+                    <a:pt x="3091262" y="3242169"/>
+                  </a:lnTo>
+                  <a:lnTo>
+                    <a:pt x="3162885" y="3256652"/>
+                  </a:lnTo>
+                  <a:lnTo>
+                    <a:pt x="3234507" y="3270267"/>
+                  </a:lnTo>
+                  <a:lnTo>
+                    <a:pt x="3306130" y="3283066"/>
+                  </a:lnTo>
+                  <a:lnTo>
+                    <a:pt x="3377752" y="3295097"/>
+                  </a:lnTo>
+                  <a:lnTo>
+                    <a:pt x="3449375" y="3306408"/>
+                  </a:lnTo>
+                  <a:lnTo>
+                    <a:pt x="3520997" y="3317040"/>
+                  </a:lnTo>
+                  <a:lnTo>
+                    <a:pt x="3592620" y="3327034"/>
+                  </a:lnTo>
+                  <a:lnTo>
+                    <a:pt x="3664242" y="3336429"/>
+                  </a:lnTo>
+                  <a:lnTo>
+                    <a:pt x="3735865" y="3345262"/>
+                  </a:lnTo>
+                  <a:lnTo>
+                    <a:pt x="3807488" y="3353564"/>
+                  </a:lnTo>
+                  <a:lnTo>
+                    <a:pt x="3879110" y="3361369"/>
+                  </a:lnTo>
+                  <a:lnTo>
+                    <a:pt x="3950733" y="3368706"/>
+                  </a:lnTo>
+                  <a:lnTo>
+                    <a:pt x="4022355" y="3375603"/>
+                  </a:lnTo>
+                  <a:lnTo>
+                    <a:pt x="4093978" y="3382086"/>
+                  </a:lnTo>
+                  <a:lnTo>
+                    <a:pt x="4165600" y="3388181"/>
                   </a:lnTo>
                 </a:path>
               </a:pathLst>
@@ -4157,7 +4157,7 @@
           </p:nvSpPr>
           <p:spPr>
             <a:xfrm>
-              <a:off x="5756448" y="2073503"/>
+              <a:off x="5759271" y="2073503"/>
               <a:ext cx="0" cy="3649639"/>
             </a:xfrm>
             <a:custGeom>
@@ -4200,7 +4200,7 @@
           </p:nvSpPr>
           <p:spPr>
             <a:xfrm>
-              <a:off x="4469314" y="2073503"/>
+              <a:off x="4504692" y="2073503"/>
               <a:ext cx="0" cy="3649639"/>
             </a:xfrm>
             <a:custGeom>
@@ -4243,7 +4243,7 @@
           </p:nvSpPr>
           <p:spPr>
             <a:xfrm>
-              <a:off x="6872676" y="2073503"/>
+              <a:off x="6871070" y="2073503"/>
               <a:ext cx="0" cy="3649639"/>
             </a:xfrm>
             <a:custGeom>
@@ -4516,7 +4516,7 @@
           </p:nvSpPr>
           <p:spPr>
             <a:xfrm>
-              <a:off x="3199861" y="5785772"/>
+              <a:off x="3201825" y="5785772"/>
               <a:ext cx="161574" cy="80101"/>
             </a:xfrm>
             <a:prstGeom prst="rect">
@@ -4562,7 +4562,7 @@
           </p:nvSpPr>
           <p:spPr>
             <a:xfrm>
-              <a:off x="5730225" y="5785772"/>
+              <a:off x="5727471" y="5785772"/>
               <a:ext cx="62179" cy="80101"/>
             </a:xfrm>
             <a:prstGeom prst="rect">
@@ -4608,7 +4608,7 @@
           </p:nvSpPr>
           <p:spPr>
             <a:xfrm>
-              <a:off x="8179802" y="5785772"/>
+              <a:off x="8172329" y="5785772"/>
               <a:ext cx="124358" cy="80101"/>
             </a:xfrm>
             <a:prstGeom prst="rect">
@@ -4779,7 +4779,7 @@
                   <a:latin typeface="Helvetica"/>
                   <a:cs typeface="Helvetica"/>
                 </a:rPr>
-                <a:t>subHR per 10 mL/min decline: 2.35 (1.25-4.41), p_Bonf = 0.046 (n = 6)  |  per IQR decline (Δ = 24.2): 7.93 (1.73-36.38)  |  IQR: [-13.0, 11.2]</a:t>
+                <a:t>subHR per 10 mL/min decline: 2.35 (1.25-4.41), p_Bonf = 0.046 (n = 6)  |  per IQR decline (Δ = 23.9): 7.71 (1.72-34.65)  |  IQR: [-12.7, 11.2]</a:t>
               </a:r>
             </a:p>
           </p:txBody>
